--- a/rapports/septembre/Marshall_sept2026.pptx
+++ b/rapports/septembre/Marshall_sept2026.pptx
@@ -6244,7 +6244,7 @@
         <p:spPr>
           <a:xfrm>
             <a:off x="8296656" y="4389120"/>
-            <a:ext cx="2072640" cy="152400"/>
+            <a:ext cx="2225040" cy="152400"/>
           </a:xfrm>
           <a:prstGeom prst="rect">
             <a:avLst/>
@@ -6265,7 +6265,7 @@
                 </a:solidFill>
                 <a:latin typeface="Arial"/>
               </a:rPr>
-              <a:t>Hi-fi (amplis, lecteurs, composants)</a:t>
+              <a:t>Casques et réduction de bruit</a:t>
             </a:r>
           </a:p>
         </p:txBody>
@@ -6323,7 +6323,7 @@
         <p:spPr>
           <a:xfrm>
             <a:off x="8296656" y="4657344"/>
-            <a:ext cx="2072640" cy="152400"/>
+            <a:ext cx="2225040" cy="152400"/>
           </a:xfrm>
           <a:prstGeom prst="rect">
             <a:avLst/>
@@ -6338,13 +6338,13 @@
           <a:p>
             <a:pPr algn="l"/>
             <a:r>
-              <a:rPr sz="1000" b="0" i="0">
+              <a:rPr sz="800" b="0" i="0">
                 <a:solidFill>
                   <a:srgbClr val="111111"/>
                 </a:solidFill>
                 <a:latin typeface="Arial"/>
               </a:rPr>
-              <a:t>Casques et écouteurs · 20 %</a:t>
+              <a:t>Enceintes Bluetooth portables · 35 %</a:t>
             </a:r>
           </a:p>
         </p:txBody>
@@ -6402,7 +6402,7 @@
         <p:spPr>
           <a:xfrm>
             <a:off x="8296656" y="4925568"/>
-            <a:ext cx="2072640" cy="152400"/>
+            <a:ext cx="2225040" cy="152400"/>
           </a:xfrm>
           <a:prstGeom prst="rect">
             <a:avLst/>
@@ -6423,7 +6423,7 @@
                 </a:solidFill>
                 <a:latin typeface="Arial"/>
               </a:rPr>
-              <a:t>Enceintes · 18 %</a:t>
+              <a:t>Enceintes pour le salon · 7 %</a:t>
             </a:r>
           </a:p>
         </p:txBody>
@@ -6481,7 +6481,7 @@
         <p:spPr>
           <a:xfrm>
             <a:off x="8296656" y="5193792"/>
-            <a:ext cx="2072640" cy="152400"/>
+            <a:ext cx="2225040" cy="152400"/>
           </a:xfrm>
           <a:prstGeom prst="rect">
             <a:avLst/>
@@ -6502,7 +6502,7 @@
                 </a:solidFill>
                 <a:latin typeface="Arial"/>
               </a:rPr>
-              <a:t>Home cinéma et récepteurs · 12 %</a:t>
+              <a:t>Enceintes de soirée · 3 %</a:t>
             </a:r>
           </a:p>
         </p:txBody>
@@ -6515,166 +6515,8 @@
         </p:nvSpPr>
         <p:spPr>
           <a:xfrm>
-            <a:off x="8077200" y="5480304"/>
-            <a:ext cx="121920" cy="121920"/>
-          </a:xfrm>
-          <a:prstGeom prst="rect">
-            <a:avLst/>
-          </a:prstGeom>
-          <a:solidFill>
-            <a:srgbClr val="3E5A78"/>
-          </a:solidFill>
-          <a:ln>
-            <a:noFill/>
-          </a:ln>
-          <a:effectLst/>
-        </p:spPr>
-        <p:style>
-          <a:lnRef idx="1">
-            <a:schemeClr val="accent1"/>
-          </a:lnRef>
-          <a:fillRef idx="3">
-            <a:schemeClr val="accent1"/>
-          </a:fillRef>
-          <a:effectRef idx="2">
-            <a:schemeClr val="accent1"/>
-          </a:effectRef>
-          <a:fontRef idx="minor">
-            <a:schemeClr val="lt1"/>
-          </a:fontRef>
-        </p:style>
-        <p:txBody>
-          <a:bodyPr rtlCol="0" anchor="ctr"/>
-          <a:lstStyle/>
-          <a:p>
-            <a:pPr algn="ctr"/>
-          </a:p>
-        </p:txBody>
-      </p:sp>
-      <p:sp>
-        <p:nvSpPr>
-          <p:cNvPr id="89" name="TextBox 88"/>
-          <p:cNvSpPr txBox="1"/>
-          <p:nvPr/>
-        </p:nvSpPr>
-        <p:spPr>
-          <a:xfrm>
-            <a:off x="8296656" y="5462016"/>
-            <a:ext cx="2072640" cy="152400"/>
-          </a:xfrm>
-          <a:prstGeom prst="rect">
-            <a:avLst/>
-          </a:prstGeom>
-          <a:noFill/>
-        </p:spPr>
-        <p:txBody>
-          <a:bodyPr wrap="square" anchor="t" lIns="0" rIns="0" tIns="0" bIns="0">
-            <a:spAutoFit/>
-          </a:bodyPr>
-          <a:lstStyle/>
-          <a:p>
-            <a:pPr algn="l"/>
-            <a:r>
-              <a:rPr sz="1000" b="0" i="0">
-                <a:solidFill>
-                  <a:srgbClr val="111111"/>
-                </a:solidFill>
-                <a:latin typeface="Arial"/>
-              </a:rPr>
-              <a:t>Platines vinyle · 11 %</a:t>
-            </a:r>
-          </a:p>
-        </p:txBody>
-      </p:sp>
-      <p:sp>
-        <p:nvSpPr>
-          <p:cNvPr id="90" name="Rectangle 89"/>
-          <p:cNvSpPr/>
-          <p:nvPr/>
-        </p:nvSpPr>
-        <p:spPr>
-          <a:xfrm>
-            <a:off x="8077200" y="5748528"/>
-            <a:ext cx="121920" cy="121920"/>
-          </a:xfrm>
-          <a:prstGeom prst="rect">
-            <a:avLst/>
-          </a:prstGeom>
-          <a:solidFill>
-            <a:srgbClr val="A09278"/>
-          </a:solidFill>
-          <a:ln>
-            <a:noFill/>
-          </a:ln>
-          <a:effectLst/>
-        </p:spPr>
-        <p:style>
-          <a:lnRef idx="1">
-            <a:schemeClr val="accent1"/>
-          </a:lnRef>
-          <a:fillRef idx="3">
-            <a:schemeClr val="accent1"/>
-          </a:fillRef>
-          <a:effectRef idx="2">
-            <a:schemeClr val="accent1"/>
-          </a:effectRef>
-          <a:fontRef idx="minor">
-            <a:schemeClr val="lt1"/>
-          </a:fontRef>
-        </p:style>
-        <p:txBody>
-          <a:bodyPr rtlCol="0" anchor="ctr"/>
-          <a:lstStyle/>
-          <a:p>
-            <a:pPr algn="ctr"/>
-          </a:p>
-        </p:txBody>
-      </p:sp>
-      <p:sp>
-        <p:nvSpPr>
-          <p:cNvPr id="91" name="TextBox 90"/>
-          <p:cNvSpPr txBox="1"/>
-          <p:nvPr/>
-        </p:nvSpPr>
-        <p:spPr>
-          <a:xfrm>
-            <a:off x="8296656" y="5730240"/>
-            <a:ext cx="2072640" cy="152400"/>
-          </a:xfrm>
-          <a:prstGeom prst="rect">
-            <a:avLst/>
-          </a:prstGeom>
-          <a:noFill/>
-        </p:spPr>
-        <p:txBody>
-          <a:bodyPr wrap="square" anchor="t" lIns="0" rIns="0" tIns="0" bIns="0">
-            <a:spAutoFit/>
-          </a:bodyPr>
-          <a:lstStyle/>
-          <a:p>
-            <a:pPr algn="l"/>
-            <a:r>
-              <a:rPr sz="1000" b="0" i="0">
-                <a:solidFill>
-                  <a:srgbClr val="111111"/>
-                </a:solidFill>
-                <a:latin typeface="Arial"/>
-              </a:rPr>
-              <a:t>Micros et radios · 8 %</a:t>
-            </a:r>
-          </a:p>
-        </p:txBody>
-      </p:sp>
-      <p:sp>
-        <p:nvSpPr>
-          <p:cNvPr id="92" name="Rectangle 91"/>
-          <p:cNvSpPr/>
-          <p:nvPr/>
-        </p:nvSpPr>
-        <p:spPr>
-          <a:xfrm>
             <a:off x="10564368" y="4450080"/>
-            <a:ext cx="475488" cy="415747"/>
+            <a:ext cx="475488" cy="737616"/>
           </a:xfrm>
           <a:prstGeom prst="rect">
             <a:avLst/>
@@ -6711,14 +6553,14 @@
       </p:sp>
       <p:sp>
         <p:nvSpPr>
-          <p:cNvPr id="93" name="TextBox 92"/>
+          <p:cNvPr id="89" name="TextBox 88"/>
           <p:cNvSpPr txBox="1"/>
           <p:nvPr/>
         </p:nvSpPr>
         <p:spPr>
           <a:xfrm>
             <a:off x="10564368" y="4450080"/>
-            <a:ext cx="475488" cy="415747"/>
+            <a:ext cx="475488" cy="737616"/>
           </a:xfrm>
           <a:prstGeom prst="rect">
             <a:avLst/>
@@ -6739,21 +6581,21 @@
                 </a:solidFill>
                 <a:latin typeface="Arial"/>
               </a:rPr>
-              <a:t>31 %</a:t>
-            </a:r>
-          </a:p>
-        </p:txBody>
-      </p:sp>
-      <p:sp>
-        <p:nvSpPr>
-          <p:cNvPr id="94" name="Rectangle 93"/>
+              <a:t>55 %</a:t>
+            </a:r>
+          </a:p>
+        </p:txBody>
+      </p:sp>
+      <p:sp>
+        <p:nvSpPr>
+          <p:cNvPr id="90" name="Rectangle 89"/>
           <p:cNvSpPr/>
           <p:nvPr/>
         </p:nvSpPr>
         <p:spPr>
           <a:xfrm>
-            <a:off x="10564368" y="4865827"/>
-            <a:ext cx="475488" cy="268224"/>
+            <a:off x="10564368" y="5187696"/>
+            <a:ext cx="475488" cy="469392"/>
           </a:xfrm>
           <a:prstGeom prst="rect">
             <a:avLst/>
@@ -6790,14 +6632,49 @@
       </p:sp>
       <p:sp>
         <p:nvSpPr>
-          <p:cNvPr id="95" name="Rectangle 94"/>
+          <p:cNvPr id="91" name="TextBox 90"/>
+          <p:cNvSpPr txBox="1"/>
+          <p:nvPr/>
+        </p:nvSpPr>
+        <p:spPr>
+          <a:xfrm>
+            <a:off x="10564368" y="5187696"/>
+            <a:ext cx="475488" cy="469392"/>
+          </a:xfrm>
+          <a:prstGeom prst="rect">
+            <a:avLst/>
+          </a:prstGeom>
+          <a:noFill/>
+        </p:spPr>
+        <p:txBody>
+          <a:bodyPr wrap="square" anchor="ctr" lIns="0" rIns="0" tIns="0" bIns="0">
+            <a:spAutoFit/>
+          </a:bodyPr>
+          <a:lstStyle/>
+          <a:p>
+            <a:pPr algn="ctr"/>
+            <a:r>
+              <a:rPr sz="1000" b="1" i="0">
+                <a:solidFill>
+                  <a:srgbClr val="FFFFFF"/>
+                </a:solidFill>
+                <a:latin typeface="Arial"/>
+              </a:rPr>
+              <a:t>35 %</a:t>
+            </a:r>
+          </a:p>
+        </p:txBody>
+      </p:sp>
+      <p:sp>
+        <p:nvSpPr>
+          <p:cNvPr id="92" name="Rectangle 91"/>
           <p:cNvSpPr/>
           <p:nvPr/>
         </p:nvSpPr>
         <p:spPr>
           <a:xfrm>
-            <a:off x="10564368" y="5134051"/>
-            <a:ext cx="475488" cy="241401"/>
+            <a:off x="10564368" y="5657088"/>
+            <a:ext cx="475488" cy="93878"/>
           </a:xfrm>
           <a:prstGeom prst="rect">
             <a:avLst/>
@@ -6834,108 +6711,20 @@
       </p:sp>
       <p:sp>
         <p:nvSpPr>
-          <p:cNvPr id="96" name="Rectangle 95"/>
+          <p:cNvPr id="93" name="Rectangle 92"/>
           <p:cNvSpPr/>
           <p:nvPr/>
         </p:nvSpPr>
         <p:spPr>
           <a:xfrm>
-            <a:off x="10564368" y="5375452"/>
-            <a:ext cx="475488" cy="160934"/>
+            <a:off x="10564368" y="5750966"/>
+            <a:ext cx="475488" cy="40233"/>
           </a:xfrm>
           <a:prstGeom prst="rect">
             <a:avLst/>
           </a:prstGeom>
           <a:solidFill>
             <a:srgbClr val="EE6A2C"/>
-          </a:solidFill>
-          <a:ln>
-            <a:noFill/>
-          </a:ln>
-          <a:effectLst/>
-        </p:spPr>
-        <p:style>
-          <a:lnRef idx="1">
-            <a:schemeClr val="accent1"/>
-          </a:lnRef>
-          <a:fillRef idx="3">
-            <a:schemeClr val="accent1"/>
-          </a:fillRef>
-          <a:effectRef idx="2">
-            <a:schemeClr val="accent1"/>
-          </a:effectRef>
-          <a:fontRef idx="minor">
-            <a:schemeClr val="lt1"/>
-          </a:fontRef>
-        </p:style>
-        <p:txBody>
-          <a:bodyPr rtlCol="0" anchor="ctr"/>
-          <a:lstStyle/>
-          <a:p>
-            <a:pPr algn="ctr"/>
-          </a:p>
-        </p:txBody>
-      </p:sp>
-      <p:sp>
-        <p:nvSpPr>
-          <p:cNvPr id="97" name="Rectangle 96"/>
-          <p:cNvSpPr/>
-          <p:nvPr/>
-        </p:nvSpPr>
-        <p:spPr>
-          <a:xfrm>
-            <a:off x="10564368" y="5536387"/>
-            <a:ext cx="475488" cy="147523"/>
-          </a:xfrm>
-          <a:prstGeom prst="rect">
-            <a:avLst/>
-          </a:prstGeom>
-          <a:solidFill>
-            <a:srgbClr val="3E5A78"/>
-          </a:solidFill>
-          <a:ln>
-            <a:noFill/>
-          </a:ln>
-          <a:effectLst/>
-        </p:spPr>
-        <p:style>
-          <a:lnRef idx="1">
-            <a:schemeClr val="accent1"/>
-          </a:lnRef>
-          <a:fillRef idx="3">
-            <a:schemeClr val="accent1"/>
-          </a:fillRef>
-          <a:effectRef idx="2">
-            <a:schemeClr val="accent1"/>
-          </a:effectRef>
-          <a:fontRef idx="minor">
-            <a:schemeClr val="lt1"/>
-          </a:fontRef>
-        </p:style>
-        <p:txBody>
-          <a:bodyPr rtlCol="0" anchor="ctr"/>
-          <a:lstStyle/>
-          <a:p>
-            <a:pPr algn="ctr"/>
-          </a:p>
-        </p:txBody>
-      </p:sp>
-      <p:sp>
-        <p:nvSpPr>
-          <p:cNvPr id="98" name="Rectangle 97"/>
-          <p:cNvSpPr/>
-          <p:nvPr/>
-        </p:nvSpPr>
-        <p:spPr>
-          <a:xfrm>
-            <a:off x="10564368" y="5683910"/>
-            <a:ext cx="475488" cy="107289"/>
-          </a:xfrm>
-          <a:prstGeom prst="rect">
-            <a:avLst/>
-          </a:prstGeom>
-          <a:solidFill>
-            <a:srgbClr val="A09278"/>
           </a:solidFill>
           <a:ln>
             <a:noFill/>

--- a/rapports/septembre/Marshall_sept2026.pptx
+++ b/rapports/septembre/Marshall_sept2026.pptx
@@ -6344,7 +6344,7 @@
                 </a:solidFill>
                 <a:latin typeface="Arial"/>
               </a:rPr>
-              <a:t>Enceintes Bluetooth portables · 35 %</a:t>
+              <a:t>Enceintes Bluetooth portables · 33 %</a:t>
             </a:r>
           </a:p>
         </p:txBody>
@@ -6423,7 +6423,7 @@
                 </a:solidFill>
                 <a:latin typeface="Arial"/>
               </a:rPr>
-              <a:t>Enceintes pour le salon · 7 %</a:t>
+              <a:t>Enceintes pour le salon · &lt; 1 %</a:t>
             </a:r>
           </a:p>
         </p:txBody>
@@ -6502,7 +6502,7 @@
                 </a:solidFill>
                 <a:latin typeface="Arial"/>
               </a:rPr>
-              <a:t>Enceintes de soirée · 3 %</a:t>
+              <a:t>Enceintes de soirée · 31 %</a:t>
             </a:r>
           </a:p>
         </p:txBody>
@@ -6516,7 +6516,7 @@
         <p:spPr>
           <a:xfrm>
             <a:off x="10564368" y="4450080"/>
-            <a:ext cx="475488" cy="737616"/>
+            <a:ext cx="475488" cy="482803"/>
           </a:xfrm>
           <a:prstGeom prst="rect">
             <a:avLst/>
@@ -6560,7 +6560,7 @@
         <p:spPr>
           <a:xfrm>
             <a:off x="10564368" y="4450080"/>
-            <a:ext cx="475488" cy="737616"/>
+            <a:ext cx="475488" cy="482803"/>
           </a:xfrm>
           <a:prstGeom prst="rect">
             <a:avLst/>
@@ -6581,7 +6581,7 @@
                 </a:solidFill>
                 <a:latin typeface="Arial"/>
               </a:rPr>
-              <a:t>55 %</a:t>
+              <a:t>36 %</a:t>
             </a:r>
           </a:p>
         </p:txBody>
@@ -6594,8 +6594,8 @@
         </p:nvSpPr>
         <p:spPr>
           <a:xfrm>
-            <a:off x="10564368" y="5187696"/>
-            <a:ext cx="475488" cy="469392"/>
+            <a:off x="10564368" y="4932883"/>
+            <a:ext cx="475488" cy="442569"/>
           </a:xfrm>
           <a:prstGeom prst="rect">
             <a:avLst/>
@@ -6638,8 +6638,8 @@
         </p:nvSpPr>
         <p:spPr>
           <a:xfrm>
-            <a:off x="10564368" y="5187696"/>
-            <a:ext cx="475488" cy="469392"/>
+            <a:off x="10564368" y="4932883"/>
+            <a:ext cx="475488" cy="442569"/>
           </a:xfrm>
           <a:prstGeom prst="rect">
             <a:avLst/>
@@ -6660,7 +6660,7 @@
                 </a:solidFill>
                 <a:latin typeface="Arial"/>
               </a:rPr>
-              <a:t>35 %</a:t>
+              <a:t>33 %</a:t>
             </a:r>
           </a:p>
         </p:txBody>
@@ -6673,8 +6673,8 @@
         </p:nvSpPr>
         <p:spPr>
           <a:xfrm>
-            <a:off x="10564368" y="5657088"/>
-            <a:ext cx="475488" cy="93878"/>
+            <a:off x="10564368" y="5375452"/>
+            <a:ext cx="475488" cy="0"/>
           </a:xfrm>
           <a:prstGeom prst="rect">
             <a:avLst/>
@@ -6717,8 +6717,8 @@
         </p:nvSpPr>
         <p:spPr>
           <a:xfrm>
-            <a:off x="10564368" y="5750966"/>
-            <a:ext cx="475488" cy="40233"/>
+            <a:off x="10564368" y="5375452"/>
+            <a:ext cx="475488" cy="415747"/>
           </a:xfrm>
           <a:prstGeom prst="rect">
             <a:avLst/>
@@ -6750,6 +6750,41 @@
           <a:lstStyle/>
           <a:p>
             <a:pPr algn="ctr"/>
+          </a:p>
+        </p:txBody>
+      </p:sp>
+      <p:sp>
+        <p:nvSpPr>
+          <p:cNvPr id="94" name="TextBox 93"/>
+          <p:cNvSpPr txBox="1"/>
+          <p:nvPr/>
+        </p:nvSpPr>
+        <p:spPr>
+          <a:xfrm>
+            <a:off x="10564368" y="5375452"/>
+            <a:ext cx="475488" cy="415747"/>
+          </a:xfrm>
+          <a:prstGeom prst="rect">
+            <a:avLst/>
+          </a:prstGeom>
+          <a:noFill/>
+        </p:spPr>
+        <p:txBody>
+          <a:bodyPr wrap="square" anchor="ctr" lIns="0" rIns="0" tIns="0" bIns="0">
+            <a:spAutoFit/>
+          </a:bodyPr>
+          <a:lstStyle/>
+          <a:p>
+            <a:pPr algn="ctr"/>
+            <a:r>
+              <a:rPr sz="1000" b="1" i="0">
+                <a:solidFill>
+                  <a:srgbClr val="FFFFFF"/>
+                </a:solidFill>
+                <a:latin typeface="Arial"/>
+              </a:rPr>
+              <a:t>31 %</a:t>
+            </a:r>
           </a:p>
         </p:txBody>
       </p:sp>
@@ -7154,7 +7189,7 @@
                 </a:solidFill>
                 <a:latin typeface="Arial"/>
               </a:rPr>
-              <a:t>Cibler les moments vacances et étudiants</a:t>
+              <a:t>Mettre en avant les enceintes Bluetooth</a:t>
             </a:r>
           </a:p>
         </p:txBody>
@@ -7189,7 +7224,7 @@
                 </a:solidFill>
                 <a:latin typeface="Arial"/>
               </a:rPr>
-              <a:t>Le départ en vacances (25,4 %) et l'équipement d'un étudiant (20,6 %) sont les deux premiers déclencheurs de conversation.</a:t>
+              <a:t>Les enceintes sans fil Bluetooth atteignent 1,28 fois le CTR moyen. L'Acton III atteint 1,79 fois et l'Emberton III 1,32 fois.</a:t>
             </a:r>
           </a:p>
         </p:txBody>
@@ -7224,7 +7259,7 @@
                 </a:solidFill>
                 <a:latin typeface="Arial"/>
               </a:rPr>
-              <a:t>→  Mettre en avant les enceintes nomades pour les vacances et les casques pour la vie étudiante.</a:t>
+              <a:t>→  Donner plus de place aux enceintes Bluetooth dans la diffusion.</a:t>
             </a:r>
           </a:p>
         </p:txBody>
@@ -7340,7 +7375,7 @@
                 </a:solidFill>
                 <a:latin typeface="Arial"/>
               </a:rPr>
-              <a:t>Rassurer sur l'utilité, la compatibilité et le prix</a:t>
+              <a:t>Revoir les enceintes de soirée</a:t>
             </a:r>
           </a:p>
         </p:txBody>
@@ -7375,7 +7410,7 @@
                 </a:solidFill>
                 <a:latin typeface="Arial"/>
               </a:rPr>
-              <a:t>Les trois premiers freins se valent : utilité réelle (23,3 %), compatibilité (22,1 %) et prix (21,7 %), souvent avec un budget précis (200 €, 400 €, 550 €).</a:t>
+              <a:t>Les enceintes sono et DJ Bromley restent à 0,63 fois la moyenne, alors qu'elles représentent 19 % de la diffusion.</a:t>
             </a:r>
           </a:p>
         </p:txBody>
@@ -7410,7 +7445,7 @@
                 </a:solidFill>
                 <a:latin typeface="Arial"/>
               </a:rPr>
-              <a:t>→  Afficher le prix et la compatibilité (Bluetooth, smartphone, platine) directement dans l'accroche.</a:t>
+              <a:t>→  Réduire leur part ou les associer à un usage précis (fête, extérieur).</a:t>
             </a:r>
           </a:p>
         </p:txBody>
@@ -7526,7 +7561,7 @@
                 </a:solidFill>
                 <a:latin typeface="Arial"/>
               </a:rPr>
-              <a:t>Une marque qui progresse dans les réponses des IA</a:t>
+              <a:t>Le prix aide à cliquer sur les casques</a:t>
             </a:r>
           </a:p>
         </p:txBody>
@@ -7561,7 +7596,7 @@
                 </a:solidFill>
                 <a:latin typeface="Arial"/>
               </a:rPr>
-              <a:t>Marshall est 5e en part de voix (8,1 %, +2,1 pts) et 4e des recommandations spontanées des IA (10,1 %, +4,5 pts). Côté ads : 14,5 % (+10,6 pts).</a:t>
+              <a:t>Le casque Major V avec son prix (149,99 €) atteint 1,44 fois la moyenne. Sans prix, le même casque reste à 0,76 fois.</a:t>
             </a:r>
           </a:p>
         </p:txBody>
@@ -7596,7 +7631,7 @@
                 </a:solidFill>
                 <a:latin typeface="Arial"/>
               </a:rPr>
-              <a:t>→  Poursuivre la montée en présence ads pour passer devant Bose et JBL.</a:t>
+              <a:t>→  Afficher le prix dans les annonces casques.</a:t>
             </a:r>
           </a:p>
         </p:txBody>
@@ -7712,7 +7747,7 @@
                 </a:solidFill>
                 <a:latin typeface="Arial"/>
               </a:rPr>
-              <a:t>Clics presque doublés</a:t>
+              <a:t>Les clics doublent presque</a:t>
             </a:r>
           </a:p>
         </p:txBody>
@@ -7747,7 +7782,7 @@
                 </a:solidFill>
                 <a:latin typeface="Arial"/>
               </a:rPr>
-              <a:t>Les clics passent de 991 à 1 862 (+88 %) pour 15 % d'impressions en plus. Le CTR passe de 0,23 % à 0,37 %.</a:t>
+              <a:t>Les clics passent de 991 à 1 862 (+88 %). Le CTR passe de 0,23 % à 0,37 %.</a:t>
             </a:r>
           </a:p>
         </p:txBody>
@@ -7782,7 +7817,7 @@
                 </a:solidFill>
                 <a:latin typeface="Arial"/>
               </a:rPr>
-              <a:t>→  Garder le ciblage et tester des accroches « son vintage » sur les enceintes et platines.</a:t>
+              <a:t>→  Concentrer le budget sur les enceintes Bluetooth et les casques avec prix.</a:t>
             </a:r>
           </a:p>
         </p:txBody>
